--- a/1-基础通识部分/第3课.pptx
+++ b/1-基础通识部分/第3课.pptx
@@ -753,7 +753,7 @@
           <a:lstStyle/>
           <a:p>
             <a:pPr indent="0">
-              <a:buFont typeface="Arial" panose="020B0604020202020204" pitchFamily="34" charset="0"/>
+              <a:buFont typeface="Arial" panose="02080604020202020204" pitchFamily="34" charset="0"/>
               <a:buNone/>
             </a:pPr>
             <a:r>
@@ -768,14 +768,14 @@
           </a:p>
           <a:p>
             <a:pPr indent="0">
-              <a:buFont typeface="Arial" panose="020B0604020202020204" pitchFamily="34" charset="0"/>
+              <a:buFont typeface="Arial" panose="02080604020202020204" pitchFamily="34" charset="0"/>
               <a:buNone/>
             </a:pPr>
             <a:endParaRPr lang="en-US" altLang="zh-CN"/>
           </a:p>
           <a:p>
             <a:pPr indent="0">
-              <a:buFont typeface="Arial" panose="020B0604020202020204" pitchFamily="34" charset="0"/>
+              <a:buFont typeface="Arial" panose="02080604020202020204" pitchFamily="34" charset="0"/>
               <a:buNone/>
             </a:pPr>
             <a:r>
@@ -786,14 +786,14 @@
           </a:p>
           <a:p>
             <a:pPr indent="0">
-              <a:buFont typeface="Arial" panose="020B0604020202020204" pitchFamily="34" charset="0"/>
+              <a:buFont typeface="Arial" panose="02080604020202020204" pitchFamily="34" charset="0"/>
               <a:buNone/>
             </a:pPr>
             <a:endParaRPr lang="zh-CN" altLang="en-US"/>
           </a:p>
           <a:p>
             <a:pPr indent="0">
-              <a:buFont typeface="Arial" panose="020B0604020202020204" pitchFamily="34" charset="0"/>
+              <a:buFont typeface="Arial" panose="02080604020202020204" pitchFamily="34" charset="0"/>
               <a:buNone/>
             </a:pPr>
             <a:r>
@@ -812,14 +812,14 @@
           </a:p>
           <a:p>
             <a:pPr indent="0">
-              <a:buFont typeface="Arial" panose="020B0604020202020204" pitchFamily="34" charset="0"/>
+              <a:buFont typeface="Arial" panose="02080604020202020204" pitchFamily="34" charset="0"/>
               <a:buNone/>
             </a:pPr>
             <a:endParaRPr lang="zh-CN" altLang="en-US"/>
           </a:p>
           <a:p>
             <a:pPr marL="171450" indent="-171450">
-              <a:buFont typeface="Arial" panose="020B0604020202020204" pitchFamily="34" charset="0"/>
+              <a:buFont typeface="Arial" panose="02080604020202020204" pitchFamily="34" charset="0"/>
               <a:buChar char="•"/>
             </a:pPr>
             <a:r>
@@ -830,7 +830,7 @@
           </a:p>
           <a:p>
             <a:pPr marL="628650" lvl="1" indent="-171450">
-              <a:buFont typeface="Arial" panose="020B0604020202020204" pitchFamily="34" charset="0"/>
+              <a:buFont typeface="Arial" panose="02080604020202020204" pitchFamily="34" charset="0"/>
               <a:buChar char="•"/>
             </a:pPr>
             <a:r>
@@ -841,7 +841,7 @@
           </a:p>
           <a:p>
             <a:pPr marL="171450" indent="-171450">
-              <a:buFont typeface="Arial" panose="020B0604020202020204" pitchFamily="34" charset="0"/>
+              <a:buFont typeface="Arial" panose="02080604020202020204" pitchFamily="34" charset="0"/>
               <a:buChar char="•"/>
             </a:pPr>
             <a:r>
@@ -987,7 +987,7 @@
           <a:lstStyle/>
           <a:p>
             <a:pPr marL="171450" indent="-171450">
-              <a:buFont typeface="Arial" panose="020B0604020202020204" pitchFamily="34" charset="0"/>
+              <a:buFont typeface="Arial" panose="02080604020202020204" pitchFamily="34" charset="0"/>
               <a:buChar char="•"/>
             </a:pPr>
             <a:endParaRPr lang="zh-CN" altLang="en-US" dirty="0"/>
@@ -1235,7 +1235,7 @@
           <a:lstStyle/>
           <a:p>
             <a:pPr marL="171450" indent="-171450">
-              <a:buFont typeface="Arial" panose="020B0604020202020204" pitchFamily="34" charset="0"/>
+              <a:buFont typeface="Arial" panose="02080604020202020204" pitchFamily="34" charset="0"/>
               <a:buChar char="•"/>
             </a:pPr>
             <a:r>
@@ -1254,7 +1254,7 @@
           </a:p>
           <a:p>
             <a:pPr marL="171450" indent="-171450">
-              <a:buFont typeface="Arial" panose="020B0604020202020204" pitchFamily="34" charset="0"/>
+              <a:buFont typeface="Arial" panose="02080604020202020204" pitchFamily="34" charset="0"/>
               <a:buChar char="•"/>
             </a:pPr>
             <a:r>
@@ -1318,7 +1318,7 @@
           <a:lstStyle/>
           <a:p>
             <a:pPr marL="171450" indent="-171450">
-              <a:buFont typeface="Arial" panose="020B0604020202020204" pitchFamily="34" charset="0"/>
+              <a:buFont typeface="Arial" panose="02080604020202020204" pitchFamily="34" charset="0"/>
               <a:buChar char="•"/>
             </a:pPr>
             <a:r>
@@ -1337,7 +1337,7 @@
           </a:p>
           <a:p>
             <a:pPr marL="628650" lvl="1" indent="-171450">
-              <a:buFont typeface="Arial" panose="020B0604020202020204" pitchFamily="34" charset="0"/>
+              <a:buFont typeface="Arial" panose="02080604020202020204" pitchFamily="34" charset="0"/>
               <a:buChar char="•"/>
             </a:pPr>
             <a:r>
@@ -1348,7 +1348,7 @@
           </a:p>
           <a:p>
             <a:pPr marL="628650" lvl="1" indent="-171450">
-              <a:buFont typeface="Arial" panose="020B0604020202020204" pitchFamily="34" charset="0"/>
+              <a:buFont typeface="Arial" panose="02080604020202020204" pitchFamily="34" charset="0"/>
               <a:buChar char="•"/>
             </a:pPr>
             <a:r>
@@ -1391,14 +1391,14 @@
           </a:p>
           <a:p>
             <a:pPr marL="171450" lvl="0" indent="-171450">
-              <a:buFont typeface="Arial" panose="020B0604020202020204" pitchFamily="34" charset="0"/>
+              <a:buFont typeface="Arial" panose="02080604020202020204" pitchFamily="34" charset="0"/>
               <a:buChar char="•"/>
             </a:pPr>
             <a:endParaRPr lang="zh-CN" altLang="en-US"/>
           </a:p>
           <a:p>
             <a:pPr marL="171450" indent="-171450">
-              <a:buFont typeface="Arial" panose="020B0604020202020204" pitchFamily="34" charset="0"/>
+              <a:buFont typeface="Arial" panose="02080604020202020204" pitchFamily="34" charset="0"/>
               <a:buChar char="•"/>
             </a:pPr>
             <a:r>
@@ -1413,14 +1413,14 @@
           </a:p>
           <a:p>
             <a:pPr marL="171450" indent="-171450">
-              <a:buFont typeface="Arial" panose="020B0604020202020204" pitchFamily="34" charset="0"/>
+              <a:buFont typeface="Arial" panose="02080604020202020204" pitchFamily="34" charset="0"/>
               <a:buChar char="•"/>
             </a:pPr>
             <a:endParaRPr lang="en-US" altLang="zh-CN"/>
           </a:p>
           <a:p>
             <a:pPr marL="171450" indent="-171450">
-              <a:buFont typeface="Arial" panose="020B0604020202020204" pitchFamily="34" charset="0"/>
+              <a:buFont typeface="Arial" panose="02080604020202020204" pitchFamily="34" charset="0"/>
               <a:buChar char="•"/>
             </a:pPr>
             <a:r>
@@ -1439,7 +1439,7 @@
           </a:p>
           <a:p>
             <a:pPr marL="628650" lvl="1" indent="-171450">
-              <a:buFont typeface="Arial" panose="020B0604020202020204" pitchFamily="34" charset="0"/>
+              <a:buFont typeface="Arial" panose="02080604020202020204" pitchFamily="34" charset="0"/>
               <a:buChar char="•"/>
             </a:pPr>
             <a:r>
@@ -1458,7 +1458,7 @@
           </a:p>
           <a:p>
             <a:pPr marL="628650" lvl="1" indent="-171450">
-              <a:buFont typeface="Arial" panose="020B0604020202020204" pitchFamily="34" charset="0"/>
+              <a:buFont typeface="Arial" panose="02080604020202020204" pitchFamily="34" charset="0"/>
               <a:buChar char="•"/>
             </a:pPr>
             <a:r>
@@ -1540,7 +1540,7 @@
           </a:p>
           <a:p>
             <a:pPr marL="171450" indent="-171450">
-              <a:buFont typeface="Arial" panose="020B0604020202020204" pitchFamily="34" charset="0"/>
+              <a:buFont typeface="Arial" panose="02080604020202020204" pitchFamily="34" charset="0"/>
               <a:buChar char="•"/>
             </a:pPr>
             <a:r>
@@ -1646,7 +1646,7 @@
           </a:p>
           <a:p>
             <a:pPr marL="171450" indent="-171450">
-              <a:buFont typeface="Arial" panose="020B0604020202020204" pitchFamily="34" charset="0"/>
+              <a:buFont typeface="Arial" panose="02080604020202020204" pitchFamily="34" charset="0"/>
               <a:buChar char="•"/>
             </a:pPr>
             <a:r>
@@ -1717,7 +1717,7 @@
           </a:p>
           <a:p>
             <a:pPr marL="171450" indent="-171450">
-              <a:buFont typeface="Arial" panose="020B0604020202020204" pitchFamily="34" charset="0"/>
+              <a:buFont typeface="Arial" panose="02080604020202020204" pitchFamily="34" charset="0"/>
               <a:buChar char="•"/>
             </a:pPr>
             <a:r>
@@ -1728,7 +1728,7 @@
           </a:p>
           <a:p>
             <a:pPr marL="171450" indent="-171450">
-              <a:buFont typeface="Arial" panose="020B0604020202020204" pitchFamily="34" charset="0"/>
+              <a:buFont typeface="Arial" panose="02080604020202020204" pitchFamily="34" charset="0"/>
               <a:buChar char="•"/>
             </a:pPr>
             <a:r>
@@ -2561,7 +2561,7 @@
                   <a:srgbClr val="BEBEBE"/>
                 </a:solidFill>
                 <a:latin typeface="Noto Sans SC" panose="020B0200000000000000" charset="-122"/>
-                <a:ea typeface="宋体" panose="02010600030101010101" pitchFamily="2" charset="-122"/>
+                <a:ea typeface="SimSun" pitchFamily="2" charset="-122"/>
                 <a:cs typeface="Noto Sans SC" panose="020B0200000000000000" charset="-122"/>
                 <a:sym typeface="Noto Sans SC" panose="020B0200000000000000" charset="-122"/>
               </a:defRPr>
@@ -3932,7 +3932,7 @@
                   </a:srgbClr>
                 </a:solidFill>
                 <a:latin typeface="Noto Sans SC" panose="020B0200000000000000" charset="-122"/>
-                <a:ea typeface="宋体" panose="02010600030101010101" pitchFamily="2" charset="-122"/>
+                <a:ea typeface="SimSun" pitchFamily="2" charset="-122"/>
                 <a:cs typeface="Noto Sans SC" panose="020B0200000000000000" charset="-122"/>
                 <a:sym typeface="Noto Sans SC" panose="020B0200000000000000" charset="-122"/>
               </a:defRPr>
@@ -8204,7 +8204,7 @@
         <a:spcBef>
           <a:spcPts val="1000"/>
         </a:spcBef>
-        <a:buFont typeface="Arial" panose="020B0604020202020204" pitchFamily="34" charset="0"/>
+        <a:buFont typeface="Arial" panose="02080604020202020204" pitchFamily="34" charset="0"/>
         <a:buChar char="•"/>
         <a:defRPr sz="2400" kern="1200">
           <a:solidFill>
@@ -8222,7 +8222,7 @@
         <a:spcBef>
           <a:spcPts val="500"/>
         </a:spcBef>
-        <a:buFont typeface="Arial" panose="020B0604020202020204" pitchFamily="34" charset="0"/>
+        <a:buFont typeface="Arial" panose="02080604020202020204" pitchFamily="34" charset="0"/>
         <a:buChar char="•"/>
         <a:defRPr sz="2000" kern="1200">
           <a:solidFill>
@@ -8240,7 +8240,7 @@
         <a:spcBef>
           <a:spcPts val="500"/>
         </a:spcBef>
-        <a:buFont typeface="Arial" panose="020B0604020202020204" pitchFamily="34" charset="0"/>
+        <a:buFont typeface="Arial" panose="02080604020202020204" pitchFamily="34" charset="0"/>
         <a:buChar char="•"/>
         <a:defRPr sz="1800" kern="1200">
           <a:solidFill>
@@ -8258,7 +8258,7 @@
         <a:spcBef>
           <a:spcPts val="500"/>
         </a:spcBef>
-        <a:buFont typeface="Arial" panose="020B0604020202020204" pitchFamily="34" charset="0"/>
+        <a:buFont typeface="Arial" panose="02080604020202020204" pitchFamily="34" charset="0"/>
         <a:buChar char="•"/>
         <a:defRPr sz="1800" kern="1200">
           <a:solidFill>
@@ -8276,7 +8276,7 @@
         <a:spcBef>
           <a:spcPts val="500"/>
         </a:spcBef>
-        <a:buFont typeface="Arial" panose="020B0604020202020204" pitchFamily="34" charset="0"/>
+        <a:buFont typeface="Arial" panose="02080604020202020204" pitchFamily="34" charset="0"/>
         <a:buChar char="•"/>
         <a:defRPr sz="1800" kern="1200">
           <a:solidFill>
@@ -8294,7 +8294,7 @@
         <a:spcBef>
           <a:spcPts val="500"/>
         </a:spcBef>
-        <a:buFont typeface="Arial" panose="020B0604020202020204" pitchFamily="34" charset="0"/>
+        <a:buFont typeface="Arial" panose="02080604020202020204" pitchFamily="34" charset="0"/>
         <a:buChar char="•"/>
         <a:defRPr sz="1800" kern="1200">
           <a:solidFill>
@@ -8312,7 +8312,7 @@
         <a:spcBef>
           <a:spcPts val="500"/>
         </a:spcBef>
-        <a:buFont typeface="Arial" panose="020B0604020202020204" pitchFamily="34" charset="0"/>
+        <a:buFont typeface="Arial" panose="02080604020202020204" pitchFamily="34" charset="0"/>
         <a:buChar char="•"/>
         <a:defRPr sz="1800" kern="1200">
           <a:solidFill>
@@ -8330,7 +8330,7 @@
         <a:spcBef>
           <a:spcPts val="500"/>
         </a:spcBef>
-        <a:buFont typeface="Arial" panose="020B0604020202020204" pitchFamily="34" charset="0"/>
+        <a:buFont typeface="Arial" panose="02080604020202020204" pitchFamily="34" charset="0"/>
         <a:buChar char="•"/>
         <a:defRPr sz="1800" kern="1200">
           <a:solidFill>
@@ -8348,7 +8348,7 @@
         <a:spcBef>
           <a:spcPts val="500"/>
         </a:spcBef>
-        <a:buFont typeface="Arial" panose="020B0604020202020204" pitchFamily="34" charset="0"/>
+        <a:buFont typeface="Arial" panose="02080604020202020204" pitchFamily="34" charset="0"/>
         <a:buChar char="•"/>
         <a:defRPr sz="1800" kern="1200">
           <a:solidFill>
@@ -8792,7 +8792,7 @@
                   <a:srgbClr val="FFFFFF"/>
                 </a:solidFill>
                 <a:latin typeface="Noto Sans SC" panose="020B0200000000000000" charset="-122"/>
-                <a:ea typeface="宋体" panose="02010600030101010101" pitchFamily="2" charset="-122"/>
+                <a:ea typeface="SimSun" pitchFamily="2" charset="-122"/>
                 <a:cs typeface="Noto Sans SC" panose="020B0200000000000000" charset="-122"/>
                 <a:sym typeface="Noto Sans SC" panose="020B0200000000000000" charset="-122"/>
               </a:rPr>
@@ -8803,7 +8803,7 @@
                 <a:srgbClr val="FFFFFF"/>
               </a:solidFill>
               <a:latin typeface="Noto Sans SC" panose="020B0200000000000000" charset="-122"/>
-              <a:ea typeface="宋体" panose="02010600030101010101" pitchFamily="2" charset="-122"/>
+              <a:ea typeface="SimSun" pitchFamily="2" charset="-122"/>
               <a:cs typeface="Noto Sans SC" panose="020B0200000000000000" charset="-122"/>
               <a:sym typeface="Noto Sans SC" panose="020B0200000000000000" charset="-122"/>
             </a:endParaRPr>
@@ -8864,7 +8864,7 @@
                   <a:srgbClr val="FFFFFF"/>
                 </a:solidFill>
                 <a:latin typeface="Noto Sans SC" panose="020B0200000000000000" charset="-122"/>
-                <a:ea typeface="宋体" panose="02010600030101010101" pitchFamily="2" charset="-122"/>
+                <a:ea typeface="SimSun" pitchFamily="2" charset="-122"/>
                 <a:cs typeface="Noto Sans SC" panose="020B0200000000000000" charset="-122"/>
                 <a:sym typeface="Noto Sans SC" panose="020B0200000000000000" charset="-122"/>
               </a:rPr>
@@ -8875,7 +8875,7 @@
                 <a:srgbClr val="FFFFFF"/>
               </a:solidFill>
               <a:latin typeface="Noto Sans SC" panose="020B0200000000000000" charset="-122"/>
-              <a:ea typeface="宋体" panose="02010600030101010101" pitchFamily="2" charset="-122"/>
+              <a:ea typeface="SimSun" pitchFamily="2" charset="-122"/>
               <a:cs typeface="Noto Sans SC" panose="020B0200000000000000" charset="-122"/>
               <a:sym typeface="Noto Sans SC" panose="020B0200000000000000" charset="-122"/>
             </a:endParaRPr>
@@ -8936,7 +8936,7 @@
                   <a:schemeClr val="bg1"/>
                 </a:solidFill>
                 <a:latin typeface="Noto Sans SC" panose="020B0200000000000000" charset="-122"/>
-                <a:ea typeface="宋体" panose="02010600030101010101" pitchFamily="2" charset="-122"/>
+                <a:ea typeface="SimSun" pitchFamily="2" charset="-122"/>
                 <a:cs typeface="Noto Sans SC" panose="020B0200000000000000" charset="-122"/>
                 <a:sym typeface="+mn-ea"/>
               </a:rPr>
@@ -8947,7 +8947,7 @@
                 <a:schemeClr val="bg1"/>
               </a:solidFill>
               <a:latin typeface="Noto Sans SC" panose="020B0200000000000000" charset="-122"/>
-              <a:ea typeface="宋体" panose="02010600030101010101" pitchFamily="2" charset="-122"/>
+              <a:ea typeface="SimSun" pitchFamily="2" charset="-122"/>
               <a:cs typeface="Noto Sans SC" panose="020B0200000000000000" charset="-122"/>
               <a:sym typeface="+mn-ea"/>
             </a:endParaRPr>
@@ -9008,7 +9008,7 @@
                   <a:srgbClr val="FFFFFF"/>
                 </a:solidFill>
                 <a:latin typeface="Noto Sans SC" panose="020B0200000000000000" charset="-122"/>
-                <a:ea typeface="宋体" panose="02010600030101010101" pitchFamily="2" charset="-122"/>
+                <a:ea typeface="SimSun" pitchFamily="2" charset="-122"/>
                 <a:cs typeface="Noto Sans SC" panose="020B0200000000000000" charset="-122"/>
                 <a:sym typeface="Noto Sans SC" panose="020B0200000000000000" charset="-122"/>
               </a:rPr>
@@ -9020,7 +9020,7 @@
                   <a:srgbClr val="FFFFFF"/>
                 </a:solidFill>
                 <a:latin typeface="Noto Sans SC" panose="020B0200000000000000" charset="-122"/>
-                <a:ea typeface="宋体" panose="02010600030101010101" pitchFamily="2" charset="-122"/>
+                <a:ea typeface="SimSun" pitchFamily="2" charset="-122"/>
                 <a:cs typeface="Noto Sans SC" panose="020B0200000000000000" charset="-122"/>
                 <a:sym typeface="Noto Sans SC" panose="020B0200000000000000" charset="-122"/>
               </a:rPr>
@@ -9031,7 +9031,7 @@
                 <a:srgbClr val="FFFFFF"/>
               </a:solidFill>
               <a:latin typeface="Noto Sans SC" panose="020B0200000000000000" charset="-122"/>
-              <a:ea typeface="宋体" panose="02010600030101010101" pitchFamily="2" charset="-122"/>
+              <a:ea typeface="SimSun" pitchFamily="2" charset="-122"/>
               <a:cs typeface="Noto Sans SC" panose="020B0200000000000000" charset="-122"/>
               <a:sym typeface="Noto Sans SC" panose="020B0200000000000000" charset="-122"/>
             </a:endParaRPr>
@@ -9309,8 +9309,8 @@
                 <a:solidFill>
                   <a:srgbClr val="00E5FA"/>
                 </a:solidFill>
-                <a:latin typeface="Arial" panose="020B0604020202020204" pitchFamily="34" charset="0"/>
-                <a:ea typeface="Arial" panose="020B0604020202020204" pitchFamily="34" charset="0"/>
+                <a:latin typeface="Arial" panose="02080604020202020204" pitchFamily="34" charset="0"/>
+                <a:ea typeface="Arial" panose="02080604020202020204" pitchFamily="34" charset="0"/>
                 <a:sym typeface="+mn-ea"/>
               </a:rPr>
               <a:t>≈</a:t>
@@ -10985,7 +10985,7 @@
                 <a:solidFill>
                   <a:schemeClr val="bg1"/>
                 </a:solidFill>
-                <a:ea typeface="宋体" panose="02010600030101010101" pitchFamily="2" charset="-122"/>
+                <a:ea typeface="SimSun" pitchFamily="2" charset="-122"/>
               </a:rPr>
               <a:t>词语：</a:t>
             </a:r>
@@ -10997,7 +10997,7 @@
                     <a:lumOff val="40000"/>
                   </a:schemeClr>
                 </a:solidFill>
-                <a:ea typeface="宋体" panose="02010600030101010101" pitchFamily="2" charset="-122"/>
+                <a:ea typeface="SimSun" pitchFamily="2" charset="-122"/>
               </a:rPr>
               <a:t>白天</a:t>
             </a:r>
@@ -11006,7 +11006,7 @@
                 <a:solidFill>
                   <a:schemeClr val="bg1"/>
                 </a:solidFill>
-                <a:ea typeface="宋体" panose="02010600030101010101" pitchFamily="2" charset="-122"/>
+                <a:ea typeface="SimSun" pitchFamily="2" charset="-122"/>
               </a:rPr>
               <a:t>，</a:t>
             </a:r>
@@ -11015,7 +11015,7 @@
                 <a:solidFill>
                   <a:srgbClr val="FEBC74"/>
                 </a:solidFill>
-                <a:ea typeface="宋体" panose="02010600030101010101" pitchFamily="2" charset="-122"/>
+                <a:ea typeface="SimSun" pitchFamily="2" charset="-122"/>
               </a:rPr>
               <a:t>燥热</a:t>
             </a:r>
@@ -11024,7 +11024,7 @@
                 <a:solidFill>
                   <a:schemeClr val="bg1"/>
                 </a:solidFill>
-                <a:ea typeface="宋体" panose="02010600030101010101" pitchFamily="2" charset="-122"/>
+                <a:ea typeface="SimSun" pitchFamily="2" charset="-122"/>
               </a:rPr>
               <a:t>，</a:t>
             </a:r>
@@ -11033,7 +11033,7 @@
                 <a:solidFill>
                   <a:srgbClr val="00E5FF"/>
                 </a:solidFill>
-                <a:ea typeface="宋体" panose="02010600030101010101" pitchFamily="2" charset="-122"/>
+                <a:ea typeface="SimSun" pitchFamily="2" charset="-122"/>
               </a:rPr>
               <a:t>夜晚</a:t>
             </a:r>
@@ -11042,7 +11042,7 @@
                 <a:solidFill>
                   <a:schemeClr val="bg1"/>
                 </a:solidFill>
-                <a:ea typeface="宋体" panose="02010600030101010101" pitchFamily="2" charset="-122"/>
+                <a:ea typeface="SimSun" pitchFamily="2" charset="-122"/>
               </a:rPr>
               <a:t>，</a:t>
             </a:r>
@@ -11051,7 +11051,7 @@
                 <a:solidFill>
                   <a:srgbClr val="69F0AE"/>
                 </a:solidFill>
-                <a:ea typeface="宋体" panose="02010600030101010101" pitchFamily="2" charset="-122"/>
+                <a:ea typeface="SimSun" pitchFamily="2" charset="-122"/>
               </a:rPr>
               <a:t>寒冷</a:t>
             </a:r>
@@ -11059,7 +11059,7 @@
               <a:solidFill>
                 <a:srgbClr val="69F0AE"/>
               </a:solidFill>
-              <a:ea typeface="宋体" panose="02010600030101010101" pitchFamily="2" charset="-122"/>
+              <a:ea typeface="SimSun" pitchFamily="2" charset="-122"/>
             </a:endParaRPr>
           </a:p>
         </p:txBody>
@@ -13688,18 +13688,18 @@
           <a:p>
             <a:r>
               <a:rPr lang="zh-CN" altLang="en-US">
-                <a:ea typeface="宋体" panose="02010600030101010101" pitchFamily="2" charset="-122"/>
+                <a:ea typeface="SimSun" pitchFamily="2" charset="-122"/>
               </a:rPr>
               <a:t>文本</a:t>
             </a:r>
             <a:r>
               <a:rPr altLang="zh-CN">
-                <a:ea typeface="宋体" panose="02010600030101010101" pitchFamily="2" charset="-122"/>
+                <a:ea typeface="SimSun" pitchFamily="2" charset="-122"/>
               </a:rPr>
               <a:t> Embedding</a:t>
             </a:r>
             <a:endParaRPr altLang="zh-CN">
-              <a:ea typeface="宋体" panose="02010600030101010101" pitchFamily="2" charset="-122"/>
+              <a:ea typeface="SimSun" pitchFamily="2" charset="-122"/>
             </a:endParaRPr>
           </a:p>
         </p:txBody>
@@ -14444,7 +14444,7 @@
                   <a:srgbClr val="FFFFFF"/>
                 </a:solidFill>
                 <a:latin typeface="Noto Sans SC" panose="020B0200000000000000" charset="-122"/>
-                <a:ea typeface="宋体" panose="02010600030101010101" pitchFamily="2" charset="-122"/>
+                <a:ea typeface="SimSun" pitchFamily="2" charset="-122"/>
                 <a:cs typeface="Noto Sans SC" panose="020B0200000000000000" charset="-122"/>
                 <a:sym typeface="Noto Sans SC" panose="020B0200000000000000" charset="-122"/>
               </a:rPr>
@@ -14455,7 +14455,7 @@
                 <a:srgbClr val="FFFFFF"/>
               </a:solidFill>
               <a:latin typeface="Noto Sans SC" panose="020B0200000000000000" charset="-122"/>
-              <a:ea typeface="宋体" panose="02010600030101010101" pitchFamily="2" charset="-122"/>
+              <a:ea typeface="SimSun" pitchFamily="2" charset="-122"/>
               <a:cs typeface="Noto Sans SC" panose="020B0200000000000000" charset="-122"/>
               <a:sym typeface="Noto Sans SC" panose="020B0200000000000000" charset="-122"/>
             </a:endParaRPr>
@@ -14516,7 +14516,7 @@
                   <a:schemeClr val="bg1"/>
                 </a:solidFill>
                 <a:latin typeface="Noto Sans SC" panose="020B0200000000000000" charset="-122"/>
-                <a:ea typeface="宋体" panose="02010600030101010101" pitchFamily="2" charset="-122"/>
+                <a:ea typeface="SimSun" pitchFamily="2" charset="-122"/>
                 <a:cs typeface="Noto Sans SC" panose="020B0200000000000000" charset="-122"/>
                 <a:sym typeface="+mn-ea"/>
               </a:rPr>
@@ -14528,7 +14528,7 @@
                   <a:schemeClr val="bg1"/>
                 </a:solidFill>
                 <a:latin typeface="Noto Sans SC" panose="020B0200000000000000" charset="-122"/>
-                <a:ea typeface="宋体" panose="02010600030101010101" pitchFamily="2" charset="-122"/>
+                <a:ea typeface="SimSun" pitchFamily="2" charset="-122"/>
                 <a:cs typeface="Noto Sans SC" panose="020B0200000000000000" charset="-122"/>
                 <a:sym typeface="+mn-ea"/>
               </a:rPr>
@@ -14540,7 +14540,7 @@
                   <a:schemeClr val="bg1"/>
                 </a:solidFill>
                 <a:latin typeface="Noto Sans SC" panose="020B0200000000000000" charset="-122"/>
-                <a:ea typeface="宋体" panose="02010600030101010101" pitchFamily="2" charset="-122"/>
+                <a:ea typeface="SimSun" pitchFamily="2" charset="-122"/>
                 <a:cs typeface="Noto Sans SC" panose="020B0200000000000000" charset="-122"/>
                 <a:sym typeface="+mn-ea"/>
               </a:rPr>
@@ -14552,7 +14552,7 @@
                   <a:schemeClr val="bg1"/>
                 </a:solidFill>
                 <a:latin typeface="Noto Sans SC" panose="020B0200000000000000" charset="-122"/>
-                <a:ea typeface="宋体" panose="02010600030101010101" pitchFamily="2" charset="-122"/>
+                <a:ea typeface="SimSun" pitchFamily="2" charset="-122"/>
                 <a:cs typeface="Noto Sans SC" panose="020B0200000000000000" charset="-122"/>
                 <a:sym typeface="+mn-ea"/>
               </a:rPr>
@@ -14564,7 +14564,7 @@
                   <a:schemeClr val="bg1"/>
                 </a:solidFill>
                 <a:latin typeface="Noto Sans SC" panose="020B0200000000000000" charset="-122"/>
-                <a:ea typeface="宋体" panose="02010600030101010101" pitchFamily="2" charset="-122"/>
+                <a:ea typeface="SimSun" pitchFamily="2" charset="-122"/>
                 <a:cs typeface="Noto Sans SC" panose="020B0200000000000000" charset="-122"/>
                 <a:sym typeface="+mn-ea"/>
               </a:rPr>
@@ -14575,7 +14575,7 @@
                 <a:schemeClr val="bg1"/>
               </a:solidFill>
               <a:latin typeface="Noto Sans SC" panose="020B0200000000000000" charset="-122"/>
-              <a:ea typeface="宋体" panose="02010600030101010101" pitchFamily="2" charset="-122"/>
+              <a:ea typeface="SimSun" pitchFamily="2" charset="-122"/>
               <a:cs typeface="Noto Sans SC" panose="020B0200000000000000" charset="-122"/>
               <a:sym typeface="+mn-ea"/>
             </a:endParaRPr>
@@ -14636,7 +14636,7 @@
                   <a:schemeClr val="bg1"/>
                 </a:solidFill>
                 <a:latin typeface="Noto Sans SC" panose="020B0200000000000000" charset="-122"/>
-                <a:ea typeface="宋体" panose="02010600030101010101" pitchFamily="2" charset="-122"/>
+                <a:ea typeface="SimSun" pitchFamily="2" charset="-122"/>
                 <a:cs typeface="Noto Sans SC" panose="020B0200000000000000" charset="-122"/>
                 <a:sym typeface="+mn-ea"/>
               </a:rPr>
@@ -14648,7 +14648,7 @@
                   <a:schemeClr val="bg1"/>
                 </a:solidFill>
                 <a:latin typeface="Noto Sans SC" panose="020B0200000000000000" charset="-122"/>
-                <a:ea typeface="宋体" panose="02010600030101010101" pitchFamily="2" charset="-122"/>
+                <a:ea typeface="SimSun" pitchFamily="2" charset="-122"/>
                 <a:cs typeface="Noto Sans SC" panose="020B0200000000000000" charset="-122"/>
                 <a:sym typeface="+mn-ea"/>
               </a:rPr>
@@ -14660,7 +14660,7 @@
                   <a:schemeClr val="bg1"/>
                 </a:solidFill>
                 <a:latin typeface="Noto Sans SC" panose="020B0200000000000000" charset="-122"/>
-                <a:ea typeface="宋体" panose="02010600030101010101" pitchFamily="2" charset="-122"/>
+                <a:ea typeface="SimSun" pitchFamily="2" charset="-122"/>
                 <a:cs typeface="Noto Sans SC" panose="020B0200000000000000" charset="-122"/>
                 <a:sym typeface="+mn-ea"/>
               </a:rPr>
@@ -14672,7 +14672,7 @@
                   <a:schemeClr val="bg1"/>
                 </a:solidFill>
                 <a:latin typeface="Noto Sans SC" panose="020B0200000000000000" charset="-122"/>
-                <a:ea typeface="宋体" panose="02010600030101010101" pitchFamily="2" charset="-122"/>
+                <a:ea typeface="SimSun" pitchFamily="2" charset="-122"/>
                 <a:cs typeface="Noto Sans SC" panose="020B0200000000000000" charset="-122"/>
                 <a:sym typeface="+mn-ea"/>
               </a:rPr>
@@ -14684,7 +14684,7 @@
                   <a:schemeClr val="bg1"/>
                 </a:solidFill>
                 <a:latin typeface="Noto Sans SC" panose="020B0200000000000000" charset="-122"/>
-                <a:ea typeface="宋体" panose="02010600030101010101" pitchFamily="2" charset="-122"/>
+                <a:ea typeface="SimSun" pitchFamily="2" charset="-122"/>
                 <a:cs typeface="Noto Sans SC" panose="020B0200000000000000" charset="-122"/>
                 <a:sym typeface="+mn-ea"/>
               </a:rPr>
@@ -14696,7 +14696,7 @@
                   <a:schemeClr val="bg1"/>
                 </a:solidFill>
                 <a:latin typeface="Noto Sans SC" panose="020B0200000000000000" charset="-122"/>
-                <a:ea typeface="宋体" panose="02010600030101010101" pitchFamily="2" charset="-122"/>
+                <a:ea typeface="SimSun" pitchFamily="2" charset="-122"/>
                 <a:cs typeface="Noto Sans SC" panose="020B0200000000000000" charset="-122"/>
                 <a:sym typeface="+mn-ea"/>
               </a:rPr>
@@ -14708,7 +14708,7 @@
                   <a:schemeClr val="bg1"/>
                 </a:solidFill>
                 <a:latin typeface="Noto Sans SC" panose="020B0200000000000000" charset="-122"/>
-                <a:ea typeface="宋体" panose="02010600030101010101" pitchFamily="2" charset="-122"/>
+                <a:ea typeface="SimSun" pitchFamily="2" charset="-122"/>
                 <a:cs typeface="Noto Sans SC" panose="020B0200000000000000" charset="-122"/>
                 <a:sym typeface="+mn-ea"/>
               </a:rPr>
@@ -14719,7 +14719,7 @@
                 <a:schemeClr val="bg1"/>
               </a:solidFill>
               <a:latin typeface="Noto Sans SC" panose="020B0200000000000000" charset="-122"/>
-              <a:ea typeface="宋体" panose="02010600030101010101" pitchFamily="2" charset="-122"/>
+              <a:ea typeface="SimSun" pitchFamily="2" charset="-122"/>
               <a:cs typeface="Noto Sans SC" panose="020B0200000000000000" charset="-122"/>
               <a:sym typeface="+mn-ea"/>
             </a:endParaRPr>
@@ -14782,7 +14782,7 @@
                   <a:schemeClr val="bg1"/>
                 </a:solidFill>
                 <a:latin typeface="Noto Sans SC" panose="020B0200000000000000" charset="-122"/>
-                <a:ea typeface="宋体" panose="02010600030101010101" pitchFamily="2" charset="-122"/>
+                <a:ea typeface="SimSun" pitchFamily="2" charset="-122"/>
                 <a:cs typeface="Noto Sans SC" panose="020B0200000000000000" charset="-122"/>
                 <a:sym typeface="+mn-ea"/>
               </a:rPr>
@@ -14794,7 +14794,7 @@
                   <a:schemeClr val="bg1"/>
                 </a:solidFill>
                 <a:latin typeface="Noto Sans SC" panose="020B0200000000000000" charset="-122"/>
-                <a:ea typeface="宋体" panose="02010600030101010101" pitchFamily="2" charset="-122"/>
+                <a:ea typeface="SimSun" pitchFamily="2" charset="-122"/>
                 <a:cs typeface="Noto Sans SC" panose="020B0200000000000000" charset="-122"/>
                 <a:sym typeface="+mn-ea"/>
               </a:rPr>
@@ -14806,7 +14806,7 @@
                   <a:schemeClr val="bg1"/>
                 </a:solidFill>
                 <a:latin typeface="Noto Sans SC" panose="020B0200000000000000" charset="-122"/>
-                <a:ea typeface="宋体" panose="02010600030101010101" pitchFamily="2" charset="-122"/>
+                <a:ea typeface="SimSun" pitchFamily="2" charset="-122"/>
                 <a:cs typeface="Noto Sans SC" panose="020B0200000000000000" charset="-122"/>
                 <a:sym typeface="+mn-ea"/>
               </a:rPr>
@@ -14817,7 +14817,7 @@
                 <a:schemeClr val="bg1"/>
               </a:solidFill>
               <a:latin typeface="Noto Sans SC" panose="020B0200000000000000" charset="-122"/>
-              <a:ea typeface="宋体" panose="02010600030101010101" pitchFamily="2" charset="-122"/>
+              <a:ea typeface="SimSun" pitchFamily="2" charset="-122"/>
               <a:cs typeface="Noto Sans SC" panose="020B0200000000000000" charset="-122"/>
               <a:sym typeface="+mn-ea"/>
             </a:endParaRPr>
@@ -14973,7 +14973,7 @@
                   <a:schemeClr val="bg1"/>
                 </a:solidFill>
                 <a:latin typeface="Noto Sans SC" panose="020B0200000000000000" charset="-122"/>
-                <a:ea typeface="宋体" panose="02010600030101010101" pitchFamily="2" charset="-122"/>
+                <a:ea typeface="SimSun" pitchFamily="2" charset="-122"/>
                 <a:cs typeface="Noto Sans SC" panose="020B0200000000000000" charset="-122"/>
                 <a:sym typeface="+mn-ea"/>
               </a:rPr>
@@ -14984,7 +14984,7 @@
                 <a:schemeClr val="bg1"/>
               </a:solidFill>
               <a:latin typeface="Noto Sans SC" panose="020B0200000000000000" charset="-122"/>
-              <a:ea typeface="宋体" panose="02010600030101010101" pitchFamily="2" charset="-122"/>
+              <a:ea typeface="SimSun" pitchFamily="2" charset="-122"/>
               <a:cs typeface="Noto Sans SC" panose="020B0200000000000000" charset="-122"/>
               <a:sym typeface="+mn-ea"/>
             </a:endParaRPr>
@@ -15047,7 +15047,7 @@
                 <a:srgbClr val="FFFFFF"/>
               </a:solidFill>
               <a:latin typeface="Noto Sans SC" panose="020B0200000000000000" charset="-122"/>
-              <a:ea typeface="宋体" panose="02010600030101010101" pitchFamily="2" charset="-122"/>
+              <a:ea typeface="SimSun" pitchFamily="2" charset="-122"/>
               <a:cs typeface="Noto Sans SC" panose="020B0200000000000000" charset="-122"/>
               <a:sym typeface="+mn-ea"/>
             </a:endParaRPr>
@@ -15108,7 +15108,7 @@
                   <a:srgbClr val="FFFFFF"/>
                 </a:solidFill>
                 <a:latin typeface="Noto Sans SC" panose="020B0200000000000000" charset="-122"/>
-                <a:ea typeface="宋体" panose="02010600030101010101" pitchFamily="2" charset="-122"/>
+                <a:ea typeface="SimSun" pitchFamily="2" charset="-122"/>
                 <a:cs typeface="Noto Sans SC" panose="020B0200000000000000" charset="-122"/>
                 <a:sym typeface="Noto Sans SC" panose="020B0200000000000000" charset="-122"/>
               </a:rPr>
@@ -15119,7 +15119,7 @@
                 <a:srgbClr val="FFFFFF"/>
               </a:solidFill>
               <a:latin typeface="Noto Sans SC" panose="020B0200000000000000" charset="-122"/>
-              <a:ea typeface="宋体" panose="02010600030101010101" pitchFamily="2" charset="-122"/>
+              <a:ea typeface="SimSun" pitchFamily="2" charset="-122"/>
               <a:cs typeface="Noto Sans SC" panose="020B0200000000000000" charset="-122"/>
               <a:sym typeface="Noto Sans SC" panose="020B0200000000000000" charset="-122"/>
             </a:endParaRPr>
@@ -15471,7 +15471,7 @@
                 <a:srgbClr val="FFFFFF"/>
               </a:solidFill>
               <a:latin typeface="Noto Sans SC" panose="020B0200000000000000" charset="-122"/>
-              <a:ea typeface="宋体" panose="02010600030101010101" pitchFamily="2" charset="-122"/>
+              <a:ea typeface="SimSun" pitchFamily="2" charset="-122"/>
               <a:cs typeface="Noto Sans SC" panose="020B0200000000000000" charset="-122"/>
               <a:sym typeface="+mn-ea"/>
             </a:endParaRPr>
@@ -15532,7 +15532,7 @@
                   <a:srgbClr val="FFFFFF"/>
                 </a:solidFill>
                 <a:latin typeface="Noto Sans SC" panose="020B0200000000000000" charset="-122"/>
-                <a:ea typeface="宋体" panose="02010600030101010101" pitchFamily="2" charset="-122"/>
+                <a:ea typeface="SimSun" pitchFamily="2" charset="-122"/>
                 <a:cs typeface="Noto Sans SC" panose="020B0200000000000000" charset="-122"/>
                 <a:sym typeface="Noto Sans SC" panose="020B0200000000000000" charset="-122"/>
               </a:rPr>
@@ -15544,7 +15544,7 @@
                   <a:srgbClr val="FFFFFF"/>
                 </a:solidFill>
                 <a:latin typeface="Noto Sans SC" panose="020B0200000000000000" charset="-122"/>
-                <a:ea typeface="宋体" panose="02010600030101010101" pitchFamily="2" charset="-122"/>
+                <a:ea typeface="SimSun" pitchFamily="2" charset="-122"/>
                 <a:cs typeface="Noto Sans SC" panose="020B0200000000000000" charset="-122"/>
                 <a:sym typeface="Noto Sans SC" panose="020B0200000000000000" charset="-122"/>
               </a:rPr>
@@ -15556,7 +15556,7 @@
                   <a:srgbClr val="FFFFFF"/>
                 </a:solidFill>
                 <a:latin typeface="Noto Sans SC" panose="020B0200000000000000" charset="-122"/>
-                <a:ea typeface="宋体" panose="02010600030101010101" pitchFamily="2" charset="-122"/>
+                <a:ea typeface="SimSun" pitchFamily="2" charset="-122"/>
                 <a:cs typeface="Noto Sans SC" panose="020B0200000000000000" charset="-122"/>
                 <a:sym typeface="Noto Sans SC" panose="020B0200000000000000" charset="-122"/>
               </a:rPr>
@@ -15568,7 +15568,7 @@
                   <a:srgbClr val="FFFFFF"/>
                 </a:solidFill>
                 <a:latin typeface="Noto Sans SC" panose="020B0200000000000000" charset="-122"/>
-                <a:ea typeface="宋体" panose="02010600030101010101" pitchFamily="2" charset="-122"/>
+                <a:ea typeface="SimSun" pitchFamily="2" charset="-122"/>
                 <a:cs typeface="Noto Sans SC" panose="020B0200000000000000" charset="-122"/>
                 <a:sym typeface="Noto Sans SC" panose="020B0200000000000000" charset="-122"/>
               </a:rPr>
@@ -15580,7 +15580,7 @@
                   <a:srgbClr val="FFFFFF"/>
                 </a:solidFill>
                 <a:latin typeface="Noto Sans SC" panose="020B0200000000000000" charset="-122"/>
-                <a:ea typeface="宋体" panose="02010600030101010101" pitchFamily="2" charset="-122"/>
+                <a:ea typeface="SimSun" pitchFamily="2" charset="-122"/>
                 <a:cs typeface="Noto Sans SC" panose="020B0200000000000000" charset="-122"/>
                 <a:sym typeface="Noto Sans SC" panose="020B0200000000000000" charset="-122"/>
               </a:rPr>
@@ -15592,7 +15592,7 @@
                   <a:srgbClr val="FFFFFF"/>
                 </a:solidFill>
                 <a:latin typeface="Noto Sans SC" panose="020B0200000000000000" charset="-122"/>
-                <a:ea typeface="宋体" panose="02010600030101010101" pitchFamily="2" charset="-122"/>
+                <a:ea typeface="SimSun" pitchFamily="2" charset="-122"/>
                 <a:cs typeface="Noto Sans SC" panose="020B0200000000000000" charset="-122"/>
                 <a:sym typeface="Noto Sans SC" panose="020B0200000000000000" charset="-122"/>
               </a:rPr>
@@ -15603,7 +15603,7 @@
                 <a:srgbClr val="FFFFFF"/>
               </a:solidFill>
               <a:latin typeface="Noto Sans SC" panose="020B0200000000000000" charset="-122"/>
-              <a:ea typeface="宋体" panose="02010600030101010101" pitchFamily="2" charset="-122"/>
+              <a:ea typeface="SimSun" pitchFamily="2" charset="-122"/>
               <a:cs typeface="Noto Sans SC" panose="020B0200000000000000" charset="-122"/>
               <a:sym typeface="Noto Sans SC" panose="020B0200000000000000" charset="-122"/>
             </a:endParaRPr>
@@ -17828,7 +17828,7 @@
         <p:spPr/>
         <p:txBody>
           <a:bodyPr>
-            <a:normAutofit/>
+            <a:normAutofit fontScale="90000"/>
           </a:bodyPr>
           <a:lstStyle/>
           <a:p>
@@ -17916,7 +17916,7 @@
                   <a:srgbClr val="FFFFFF"/>
                 </a:solidFill>
                 <a:latin typeface="Noto Sans SC" panose="020B0200000000000000" charset="-122"/>
-                <a:ea typeface="宋体" panose="02010600030101010101" pitchFamily="2" charset="-122"/>
+                <a:ea typeface="SimSun" pitchFamily="2" charset="-122"/>
                 <a:cs typeface="Noto Sans SC" panose="020B0200000000000000" charset="-122"/>
                 <a:sym typeface="Noto Sans SC" panose="020B0200000000000000" charset="-122"/>
               </a:rPr>
@@ -17927,7 +17927,7 @@
                 <a:srgbClr val="FFFFFF"/>
               </a:solidFill>
               <a:latin typeface="Noto Sans SC" panose="020B0200000000000000" charset="-122"/>
-              <a:ea typeface="宋体" panose="02010600030101010101" pitchFamily="2" charset="-122"/>
+              <a:ea typeface="SimSun" pitchFamily="2" charset="-122"/>
               <a:cs typeface="Noto Sans SC" panose="020B0200000000000000" charset="-122"/>
               <a:sym typeface="Noto Sans SC" panose="020B0200000000000000" charset="-122"/>
             </a:endParaRPr>
@@ -17945,7 +17945,7 @@
                   <a:srgbClr val="FFFFFF"/>
                 </a:solidFill>
                 <a:latin typeface="Noto Sans SC" panose="020B0200000000000000" charset="-122"/>
-                <a:ea typeface="宋体" panose="02010600030101010101" pitchFamily="2" charset="-122"/>
+                <a:ea typeface="SimSun" pitchFamily="2" charset="-122"/>
                 <a:cs typeface="Noto Sans SC" panose="020B0200000000000000" charset="-122"/>
                 <a:sym typeface="Noto Sans SC" panose="020B0200000000000000" charset="-122"/>
               </a:rPr>
@@ -17956,7 +17956,7 @@
                 <a:srgbClr val="FFFFFF"/>
               </a:solidFill>
               <a:latin typeface="Noto Sans SC" panose="020B0200000000000000" charset="-122"/>
-              <a:ea typeface="宋体" panose="02010600030101010101" pitchFamily="2" charset="-122"/>
+              <a:ea typeface="SimSun" pitchFamily="2" charset="-122"/>
               <a:cs typeface="Noto Sans SC" panose="020B0200000000000000" charset="-122"/>
               <a:sym typeface="Noto Sans SC" panose="020B0200000000000000" charset="-122"/>
             </a:endParaRPr>
@@ -17974,7 +17974,7 @@
                   <a:srgbClr val="FFFFFF"/>
                 </a:solidFill>
                 <a:latin typeface="Noto Sans SC" panose="020B0200000000000000" charset="-122"/>
-                <a:ea typeface="宋体" panose="02010600030101010101" pitchFamily="2" charset="-122"/>
+                <a:ea typeface="SimSun" pitchFamily="2" charset="-122"/>
                 <a:cs typeface="Noto Sans SC" panose="020B0200000000000000" charset="-122"/>
                 <a:sym typeface="Noto Sans SC" panose="020B0200000000000000" charset="-122"/>
               </a:rPr>
@@ -17985,7 +17985,7 @@
                 <a:srgbClr val="FFFFFF"/>
               </a:solidFill>
               <a:latin typeface="Noto Sans SC" panose="020B0200000000000000" charset="-122"/>
-              <a:ea typeface="宋体" panose="02010600030101010101" pitchFamily="2" charset="-122"/>
+              <a:ea typeface="SimSun" pitchFamily="2" charset="-122"/>
               <a:cs typeface="Noto Sans SC" panose="020B0200000000000000" charset="-122"/>
               <a:sym typeface="Noto Sans SC" panose="020B0200000000000000" charset="-122"/>
             </a:endParaRPr>
@@ -18003,7 +18003,7 @@
                   <a:srgbClr val="FFFFFF"/>
                 </a:solidFill>
                 <a:latin typeface="Noto Sans SC" panose="020B0200000000000000" charset="-122"/>
-                <a:ea typeface="宋体" panose="02010600030101010101" pitchFamily="2" charset="-122"/>
+                <a:ea typeface="SimSun" pitchFamily="2" charset="-122"/>
                 <a:cs typeface="Noto Sans SC" panose="020B0200000000000000" charset="-122"/>
                 <a:sym typeface="Noto Sans SC" panose="020B0200000000000000" charset="-122"/>
               </a:rPr>
@@ -18014,7 +18014,7 @@
                 <a:srgbClr val="FFFFFF"/>
               </a:solidFill>
               <a:latin typeface="Noto Sans SC" panose="020B0200000000000000" charset="-122"/>
-              <a:ea typeface="宋体" panose="02010600030101010101" pitchFamily="2" charset="-122"/>
+              <a:ea typeface="SimSun" pitchFamily="2" charset="-122"/>
               <a:cs typeface="Noto Sans SC" panose="020B0200000000000000" charset="-122"/>
               <a:sym typeface="Noto Sans SC" panose="020B0200000000000000" charset="-122"/>
             </a:endParaRPr>
@@ -18032,7 +18032,7 @@
                   <a:srgbClr val="FFFFFF"/>
                 </a:solidFill>
                 <a:latin typeface="Noto Sans SC" panose="020B0200000000000000" charset="-122"/>
-                <a:ea typeface="宋体" panose="02010600030101010101" pitchFamily="2" charset="-122"/>
+                <a:ea typeface="SimSun" pitchFamily="2" charset="-122"/>
                 <a:cs typeface="Noto Sans SC" panose="020B0200000000000000" charset="-122"/>
                 <a:sym typeface="Noto Sans SC" panose="020B0200000000000000" charset="-122"/>
               </a:rPr>
@@ -18043,326 +18043,7 @@
                 <a:srgbClr val="FFFFFF"/>
               </a:solidFill>
               <a:latin typeface="Noto Sans SC" panose="020B0200000000000000" charset="-122"/>
-              <a:ea typeface="宋体" panose="02010600030101010101" pitchFamily="2" charset="-122"/>
-              <a:cs typeface="Noto Sans SC" panose="020B0200000000000000" charset="-122"/>
-              <a:sym typeface="Noto Sans SC" panose="020B0200000000000000" charset="-122"/>
-            </a:endParaRPr>
-          </a:p>
-        </p:txBody>
-      </p:sp>
-      <p:sp>
-        <p:nvSpPr>
-          <p:cNvPr id="5" name="AutoShape 6"/>
-          <p:cNvSpPr/>
-          <p:nvPr/>
-        </p:nvSpPr>
-        <p:spPr>
-          <a:xfrm>
-            <a:off x="3395980" y="1753235"/>
-            <a:ext cx="899795" cy="1543050"/>
-          </a:xfrm>
-          <a:prstGeom prst="roundRect">
-            <a:avLst>
-              <a:gd name="adj" fmla="val 0"/>
-            </a:avLst>
-          </a:prstGeom>
-          <a:solidFill>
-            <a:srgbClr val="B388FF">
-              <a:alpha val="8000"/>
-            </a:srgbClr>
-          </a:solidFill>
-          <a:ln w="25400" cap="flat" cmpd="sng">
-            <a:solidFill>
-              <a:srgbClr val="B388FF">
-                <a:alpha val="100000"/>
-              </a:srgbClr>
-            </a:solidFill>
-            <a:prstDash val="solid"/>
-            <a:round/>
-          </a:ln>
-          <a:effectLst>
-            <a:outerShdw blurRad="152400" dir="2700000" algn="tl" rotWithShape="0">
-              <a:srgbClr val="06F0D2">
-                <a:alpha val="40000"/>
-              </a:srgbClr>
-            </a:outerShdw>
-          </a:effectLst>
-        </p:spPr>
-        <p:txBody>
-          <a:bodyPr vert="horz" wrap="square" lIns="0" tIns="0" rIns="0" bIns="0" rtlCol="0" anchor="ctr" anchorCtr="0"/>
-          <a:lstStyle/>
-          <a:p>
-            <a:pPr marL="0" indent="0" algn="ctr">
-              <a:lnSpc>
-                <a:spcPct val="125000"/>
-              </a:lnSpc>
-              <a:defRPr/>
-            </a:pPr>
-            <a:r>
-              <a:rPr lang="zh-CN" altLang="en-US" sz="2400" b="1" i="0" u="none" strike="noStrike">
-                <a:solidFill>
-                  <a:srgbClr val="FFFFFF"/>
-                </a:solidFill>
-                <a:latin typeface="Noto Sans SC" panose="020B0200000000000000" charset="-122"/>
-                <a:ea typeface="宋体" panose="02010600030101010101" pitchFamily="2" charset="-122"/>
-                <a:cs typeface="Noto Sans SC" panose="020B0200000000000000" charset="-122"/>
-                <a:sym typeface="Noto Sans SC" panose="020B0200000000000000" charset="-122"/>
-              </a:rPr>
-              <a:t>模型</a:t>
-            </a:r>
-            <a:endParaRPr lang="zh-CN" altLang="en-US" sz="2400" b="1" i="0" u="none" strike="noStrike">
-              <a:solidFill>
-                <a:srgbClr val="FFFFFF"/>
-              </a:solidFill>
-              <a:latin typeface="Noto Sans SC" panose="020B0200000000000000" charset="-122"/>
-              <a:ea typeface="宋体" panose="02010600030101010101" pitchFamily="2" charset="-122"/>
-              <a:cs typeface="Noto Sans SC" panose="020B0200000000000000" charset="-122"/>
-              <a:sym typeface="Noto Sans SC" panose="020B0200000000000000" charset="-122"/>
-            </a:endParaRPr>
-          </a:p>
-          <a:p>
-            <a:pPr marL="0" indent="0" algn="ctr">
-              <a:lnSpc>
-                <a:spcPct val="125000"/>
-              </a:lnSpc>
-              <a:defRPr/>
-            </a:pPr>
-            <a:r>
-              <a:rPr lang="zh-CN" altLang="en-US" sz="2400" b="1" i="0" u="none" strike="noStrike">
-                <a:solidFill>
-                  <a:srgbClr val="FFFFFF"/>
-                </a:solidFill>
-                <a:latin typeface="Noto Sans SC" panose="020B0200000000000000" charset="-122"/>
-                <a:ea typeface="宋体" panose="02010600030101010101" pitchFamily="2" charset="-122"/>
-                <a:cs typeface="Noto Sans SC" panose="020B0200000000000000" charset="-122"/>
-                <a:sym typeface="Noto Sans SC" panose="020B0200000000000000" charset="-122"/>
-              </a:rPr>
-              <a:t>原理</a:t>
-            </a:r>
-            <a:endParaRPr lang="zh-CN" altLang="en-US" sz="2400" b="1" i="0" u="none" strike="noStrike">
-              <a:solidFill>
-                <a:srgbClr val="FFFFFF"/>
-              </a:solidFill>
-              <a:latin typeface="Noto Sans SC" panose="020B0200000000000000" charset="-122"/>
-              <a:ea typeface="宋体" panose="02010600030101010101" pitchFamily="2" charset="-122"/>
-              <a:cs typeface="Noto Sans SC" panose="020B0200000000000000" charset="-122"/>
-              <a:sym typeface="Noto Sans SC" panose="020B0200000000000000" charset="-122"/>
-            </a:endParaRPr>
-          </a:p>
-        </p:txBody>
-      </p:sp>
-      <p:sp>
-        <p:nvSpPr>
-          <p:cNvPr id="7" name="AutoShape 6"/>
-          <p:cNvSpPr/>
-          <p:nvPr/>
-        </p:nvSpPr>
-        <p:spPr>
-          <a:xfrm>
-            <a:off x="3395980" y="3416935"/>
-            <a:ext cx="899795" cy="1547495"/>
-          </a:xfrm>
-          <a:prstGeom prst="roundRect">
-            <a:avLst>
-              <a:gd name="adj" fmla="val 0"/>
-            </a:avLst>
-          </a:prstGeom>
-          <a:solidFill>
-            <a:srgbClr val="B388FF">
-              <a:alpha val="8000"/>
-            </a:srgbClr>
-          </a:solidFill>
-          <a:ln w="25400" cap="flat" cmpd="sng">
-            <a:solidFill>
-              <a:srgbClr val="B388FF">
-                <a:alpha val="100000"/>
-              </a:srgbClr>
-            </a:solidFill>
-            <a:prstDash val="solid"/>
-            <a:round/>
-          </a:ln>
-          <a:effectLst>
-            <a:outerShdw blurRad="152400" dir="2700000" algn="tl" rotWithShape="0">
-              <a:srgbClr val="06F0D2">
-                <a:alpha val="40000"/>
-              </a:srgbClr>
-            </a:outerShdw>
-          </a:effectLst>
-        </p:spPr>
-        <p:txBody>
-          <a:bodyPr vert="horz" wrap="square" lIns="0" tIns="0" rIns="0" bIns="0" rtlCol="0" anchor="ctr" anchorCtr="0">
-            <a:noAutofit/>
-          </a:bodyPr>
-          <a:lstStyle/>
-          <a:p>
-            <a:pPr lvl="0" algn="ctr">
-              <a:lnSpc>
-                <a:spcPct val="125000"/>
-              </a:lnSpc>
-              <a:buClrTx/>
-              <a:buSzTx/>
-              <a:buFontTx/>
-              <a:defRPr/>
-            </a:pPr>
-            <a:r>
-              <a:rPr lang="zh-CN" altLang="en-US" sz="2400" b="1">
-                <a:solidFill>
-                  <a:srgbClr val="FFFFFF"/>
-                </a:solidFill>
-                <a:latin typeface="Noto Sans SC" panose="020B0200000000000000" charset="-122"/>
-                <a:ea typeface="宋体" panose="02010600030101010101" pitchFamily="2" charset="-122"/>
-                <a:cs typeface="Noto Sans SC" panose="020B0200000000000000" charset="-122"/>
-                <a:sym typeface="Noto Sans SC" panose="020B0200000000000000" charset="-122"/>
-              </a:rPr>
-              <a:t>模型</a:t>
-            </a:r>
-            <a:endParaRPr lang="zh-CN" altLang="en-US" sz="2400" b="1">
-              <a:solidFill>
-                <a:srgbClr val="FFFFFF"/>
-              </a:solidFill>
-              <a:latin typeface="Noto Sans SC" panose="020B0200000000000000" charset="-122"/>
-              <a:ea typeface="宋体" panose="02010600030101010101" pitchFamily="2" charset="-122"/>
-              <a:cs typeface="Noto Sans SC" panose="020B0200000000000000" charset="-122"/>
-              <a:sym typeface="Noto Sans SC" panose="020B0200000000000000" charset="-122"/>
-            </a:endParaRPr>
-          </a:p>
-          <a:p>
-            <a:pPr lvl="0" algn="ctr">
-              <a:lnSpc>
-                <a:spcPct val="125000"/>
-              </a:lnSpc>
-              <a:buClrTx/>
-              <a:buSzTx/>
-              <a:buFontTx/>
-              <a:defRPr/>
-            </a:pPr>
-            <a:r>
-              <a:rPr lang="zh-CN" altLang="en-US" sz="2400" b="1">
-                <a:solidFill>
-                  <a:srgbClr val="FFFFFF"/>
-                </a:solidFill>
-                <a:latin typeface="Noto Sans SC" panose="020B0200000000000000" charset="-122"/>
-                <a:ea typeface="宋体" panose="02010600030101010101" pitchFamily="2" charset="-122"/>
-                <a:cs typeface="Noto Sans SC" panose="020B0200000000000000" charset="-122"/>
-                <a:sym typeface="Noto Sans SC" panose="020B0200000000000000" charset="-122"/>
-              </a:rPr>
-              <a:t>应用</a:t>
-            </a:r>
-            <a:endParaRPr lang="zh-CN" altLang="en-US" sz="2400" b="1">
-              <a:solidFill>
-                <a:srgbClr val="FFFFFF"/>
-              </a:solidFill>
-              <a:latin typeface="Noto Sans SC" panose="020B0200000000000000" charset="-122"/>
-              <a:ea typeface="宋体" panose="02010600030101010101" pitchFamily="2" charset="-122"/>
-              <a:cs typeface="Noto Sans SC" panose="020B0200000000000000" charset="-122"/>
-              <a:sym typeface="Noto Sans SC" panose="020B0200000000000000" charset="-122"/>
-            </a:endParaRPr>
-          </a:p>
-        </p:txBody>
-      </p:sp>
-      <p:sp>
-        <p:nvSpPr>
-          <p:cNvPr id="8" name="AutoShape 6"/>
-          <p:cNvSpPr/>
-          <p:nvPr/>
-        </p:nvSpPr>
-        <p:spPr>
-          <a:xfrm>
-            <a:off x="3395980" y="5086985"/>
-            <a:ext cx="899795" cy="989330"/>
-          </a:xfrm>
-          <a:prstGeom prst="roundRect">
-            <a:avLst>
-              <a:gd name="adj" fmla="val 0"/>
-            </a:avLst>
-          </a:prstGeom>
-          <a:solidFill>
-            <a:srgbClr val="B388FF">
-              <a:alpha val="8000"/>
-            </a:srgbClr>
-          </a:solidFill>
-          <a:ln w="25400" cap="flat" cmpd="sng">
-            <a:solidFill>
-              <a:srgbClr val="B388FF">
-                <a:alpha val="100000"/>
-              </a:srgbClr>
-            </a:solidFill>
-            <a:prstDash val="solid"/>
-            <a:round/>
-          </a:ln>
-          <a:effectLst>
-            <a:outerShdw blurRad="152400" dir="2700000" algn="tl" rotWithShape="0">
-              <a:srgbClr val="06F0D2">
-                <a:alpha val="40000"/>
-              </a:srgbClr>
-            </a:outerShdw>
-          </a:effectLst>
-        </p:spPr>
-        <p:txBody>
-          <a:bodyPr vert="horz" wrap="square" lIns="0" tIns="0" rIns="0" bIns="0" rtlCol="0" anchor="ctr" anchorCtr="0">
-            <a:noAutofit/>
-          </a:bodyPr>
-          <a:lstStyle/>
-          <a:p>
-            <a:pPr lvl="0" algn="ctr">
-              <a:lnSpc>
-                <a:spcPct val="125000"/>
-              </a:lnSpc>
-              <a:buClrTx/>
-              <a:buSzTx/>
-              <a:buFontTx/>
-              <a:defRPr/>
-            </a:pPr>
-            <a:r>
-              <a:rPr lang="zh-CN" altLang="en-US" sz="2400" b="1">
-                <a:solidFill>
-                  <a:srgbClr val="FFFFFF"/>
-                </a:solidFill>
-                <a:latin typeface="Noto Sans SC" panose="020B0200000000000000" charset="-122"/>
-                <a:ea typeface="宋体" panose="02010600030101010101" pitchFamily="2" charset="-122"/>
-                <a:cs typeface="Noto Sans SC" panose="020B0200000000000000" charset="-122"/>
-                <a:sym typeface="Noto Sans SC" panose="020B0200000000000000" charset="-122"/>
-              </a:rPr>
-              <a:t>智</a:t>
-            </a:r>
-            <a:endParaRPr lang="zh-CN" altLang="en-US" sz="2400" b="1">
-              <a:solidFill>
-                <a:srgbClr val="FFFFFF"/>
-              </a:solidFill>
-              <a:latin typeface="Noto Sans SC" panose="020B0200000000000000" charset="-122"/>
-              <a:ea typeface="宋体" panose="02010600030101010101" pitchFamily="2" charset="-122"/>
-              <a:cs typeface="Noto Sans SC" panose="020B0200000000000000" charset="-122"/>
-              <a:sym typeface="Noto Sans SC" panose="020B0200000000000000" charset="-122"/>
-            </a:endParaRPr>
-          </a:p>
-          <a:p>
-            <a:pPr lvl="0" algn="ctr">
-              <a:lnSpc>
-                <a:spcPct val="125000"/>
-              </a:lnSpc>
-              <a:buClrTx/>
-              <a:buSzTx/>
-              <a:buFontTx/>
-              <a:defRPr/>
-            </a:pPr>
-            <a:r>
-              <a:rPr lang="zh-CN" altLang="en-US" sz="2400" b="1">
-                <a:solidFill>
-                  <a:srgbClr val="FFFFFF"/>
-                </a:solidFill>
-                <a:latin typeface="Noto Sans SC" panose="020B0200000000000000" charset="-122"/>
-                <a:ea typeface="宋体" panose="02010600030101010101" pitchFamily="2" charset="-122"/>
-                <a:cs typeface="Noto Sans SC" panose="020B0200000000000000" charset="-122"/>
-                <a:sym typeface="Noto Sans SC" panose="020B0200000000000000" charset="-122"/>
-              </a:rPr>
-              <a:t>能体</a:t>
-            </a:r>
-            <a:endParaRPr lang="zh-CN" altLang="en-US" sz="2400" b="1">
-              <a:solidFill>
-                <a:srgbClr val="FFFFFF"/>
-              </a:solidFill>
-              <a:latin typeface="Noto Sans SC" panose="020B0200000000000000" charset="-122"/>
-              <a:ea typeface="宋体" panose="02010600030101010101" pitchFamily="2" charset="-122"/>
+              <a:ea typeface="SimSun" pitchFamily="2" charset="-122"/>
               <a:cs typeface="Noto Sans SC" panose="020B0200000000000000" charset="-122"/>
               <a:sym typeface="Noto Sans SC" panose="020B0200000000000000" charset="-122"/>
             </a:endParaRPr>
@@ -18536,7 +18217,7 @@
                   <a:ea typeface="Noto Sans SC" panose="020B0200000000000000" charset="-122"/>
                   <a:cs typeface="Noto Sans SC" panose="020B0200000000000000" charset="-122"/>
                 </a:rPr>
-                <a:t>模型定位和介绍</a:t>
+                <a:t>AI产品定位和介绍</a:t>
               </a:r>
               <a:endParaRPr lang="zh-CN" altLang="en-US" b="1" kern="0">
                 <a:solidFill>
@@ -18741,7 +18422,7 @@
                   <a:ea typeface="Noto Sans SC" panose="020B0200000000000000" charset="-122"/>
                   <a:cs typeface="Noto Sans SC" panose="020B0200000000000000" charset="-122"/>
                 </a:rPr>
-                <a:t>模型训练、选型与评估</a:t>
+                <a:t>大模型的训练、选型与评估</a:t>
               </a:r>
               <a:endParaRPr lang="zh-CN" altLang="en-US" b="1" kern="0">
                 <a:solidFill>
@@ -18948,7 +18629,7 @@
                   <a:ea typeface="Noto Sans SC" panose="020B0200000000000000" charset="-122"/>
                   <a:cs typeface="Noto Sans SC" panose="020B0200000000000000" charset="-122"/>
                 </a:rPr>
-                <a:t>智能体框架与工具使用</a:t>
+                <a:t>大模型的思维提示、智能体与工具</a:t>
               </a:r>
               <a:endParaRPr lang="zh-CN" altLang="en-US" b="1" kern="0">
                 <a:solidFill>
@@ -19131,7 +18812,7 @@
                   <a:ea typeface="Noto Sans SC" panose="020B0200000000000000" charset="-122"/>
                   <a:cs typeface="Noto Sans SC" panose="020B0200000000000000" charset="-122"/>
                 </a:rPr>
-                <a:t>生成机制</a:t>
+                <a:t>大模型的生成机制</a:t>
               </a:r>
               <a:endParaRPr lang="zh-CN" altLang="en-US" b="1" kern="0">
                 <a:solidFill>
@@ -19312,7 +18993,7 @@
                   <a:ea typeface="Noto Sans SC" panose="020B0200000000000000" charset="-122"/>
                   <a:cs typeface="Noto Sans SC" panose="020B0200000000000000" charset="-122"/>
                 </a:rPr>
-                <a:t>token </a:t>
+                <a:t>Token</a:t>
               </a:r>
               <a:r>
                 <a:rPr lang="zh-CN" altLang="en-US" b="1" kern="0">
@@ -19320,10 +19001,21 @@
                     <a:srgbClr val="FFE3B1"/>
                   </a:solidFill>
                   <a:latin typeface="Noto Sans SC" panose="020B0200000000000000" charset="-122"/>
-                  <a:ea typeface="宋体" panose="02010600030101010101" pitchFamily="2" charset="-122"/>
+                  <a:ea typeface="Noto Sans SC" panose="020B0200000000000000" charset="-122"/>
                   <a:cs typeface="Noto Sans SC" panose="020B0200000000000000" charset="-122"/>
                 </a:rPr>
-                <a:t>和</a:t>
+                <a:t>、</a:t>
+              </a:r>
+              <a:r>
+                <a:rPr lang="zh-CN" altLang="en-US" b="1" kern="0">
+                  <a:solidFill>
+                    <a:srgbClr val="FFE3B1"/>
+                  </a:solidFill>
+                  <a:latin typeface="Noto Sans SC" panose="020B0200000000000000" charset="-122"/>
+                  <a:ea typeface="SimSun" pitchFamily="2" charset="-122"/>
+                  <a:cs typeface="Noto Sans SC" panose="020B0200000000000000" charset="-122"/>
+                </a:rPr>
+                <a:t>E</a:t>
               </a:r>
               <a:r>
                 <a:rPr lang="en-US" altLang="zh-CN" b="1" kern="0">
@@ -19331,10 +19023,10 @@
                     <a:srgbClr val="FFE3B1"/>
                   </a:solidFill>
                   <a:latin typeface="Noto Sans SC" panose="020B0200000000000000" charset="-122"/>
-                  <a:ea typeface="宋体" panose="02010600030101010101" pitchFamily="2" charset="-122"/>
+                  <a:ea typeface="SimSun" pitchFamily="2" charset="-122"/>
                   <a:cs typeface="Noto Sans SC" panose="020B0200000000000000" charset="-122"/>
                 </a:rPr>
-                <a:t> </a:t>
+                <a:t>m</a:t>
               </a:r>
               <a:r>
                 <a:rPr lang="en-US" altLang="zh-CN" b="1" kern="0">
@@ -19345,7 +19037,7 @@
                   <a:ea typeface="Noto Sans SC" panose="020B0200000000000000" charset="-122"/>
                   <a:cs typeface="Noto Sans SC" panose="020B0200000000000000" charset="-122"/>
                 </a:rPr>
-                <a:t>embedding</a:t>
+                <a:t>bedding 和 RAG</a:t>
               </a:r>
               <a:endParaRPr lang="zh-CN" altLang="en-US" b="1" kern="0">
                 <a:solidFill>
@@ -19550,7 +19242,7 @@
                   <a:ea typeface="Noto Sans SC" panose="020B0200000000000000" charset="-122"/>
                   <a:cs typeface="Noto Sans SC" panose="020B0200000000000000" charset="-122"/>
                 </a:rPr>
-                <a:t>注意力、算力和模型大小</a:t>
+                <a:t>Transformer、注意力、算力与缓存机制</a:t>
               </a:r>
               <a:endParaRPr lang="zh-CN" altLang="en-US" b="1" kern="0">
                 <a:solidFill>
@@ -19757,7 +19449,7 @@
                   <a:ea typeface="Noto Sans SC" panose="020B0200000000000000" charset="-122"/>
                   <a:cs typeface="Noto Sans SC" panose="020B0200000000000000" charset="-122"/>
                 </a:rPr>
-                <a:t>提示词技术</a:t>
+                <a:t>提示词与提示词工程</a:t>
               </a:r>
               <a:endParaRPr lang="zh-CN" altLang="en-US" b="1" kern="0">
                 <a:solidFill>
@@ -19964,7 +19656,7 @@
                   <a:ea typeface="Noto Sans SC" panose="020B0200000000000000" charset="-122"/>
                   <a:cs typeface="Noto Sans SC" panose="020B0200000000000000" charset="-122"/>
                 </a:rPr>
-                <a:t>智能体记忆与案例剖析</a:t>
+                <a:t>智能体记忆、技能与案例</a:t>
               </a:r>
               <a:endParaRPr lang="zh-CN" altLang="en-US" b="1" kern="0">
                 <a:solidFill>
@@ -19980,6 +19672,248 @@
           </p:txBody>
         </p:sp>
       </p:grpSp>
+      <p:sp>
+        <p:nvSpPr>
+          <p:cNvPr id="3" name="AutoShape 6"/>
+          <p:cNvSpPr/>
+          <p:nvPr/>
+        </p:nvSpPr>
+        <p:spPr>
+          <a:xfrm>
+            <a:off x="3395980" y="1753235"/>
+            <a:ext cx="899795" cy="2653665"/>
+          </a:xfrm>
+          <a:prstGeom prst="roundRect">
+            <a:avLst>
+              <a:gd name="adj" fmla="val 0"/>
+            </a:avLst>
+          </a:prstGeom>
+          <a:solidFill>
+            <a:srgbClr val="B388FF">
+              <a:alpha val="8000"/>
+            </a:srgbClr>
+          </a:solidFill>
+          <a:ln w="25400" cap="flat" cmpd="sng">
+            <a:solidFill>
+              <a:srgbClr val="B388FF">
+                <a:alpha val="100000"/>
+              </a:srgbClr>
+            </a:solidFill>
+            <a:prstDash val="solid"/>
+            <a:round/>
+          </a:ln>
+          <a:effectLst>
+            <a:outerShdw blurRad="152400" dir="2700000" algn="tl" rotWithShape="0">
+              <a:srgbClr val="06F0D2">
+                <a:alpha val="40000"/>
+              </a:srgbClr>
+            </a:outerShdw>
+          </a:effectLst>
+        </p:spPr>
+        <p:txBody>
+          <a:bodyPr vert="horz" wrap="square" lIns="0" tIns="0" rIns="0" bIns="0" rtlCol="0" anchor="ctr" anchorCtr="0"/>
+          <a:lstStyle/>
+          <a:p>
+            <a:pPr marL="0" indent="0" algn="ctr">
+              <a:lnSpc>
+                <a:spcPct val="125000"/>
+              </a:lnSpc>
+              <a:defRPr/>
+            </a:pPr>
+            <a:r>
+              <a:rPr lang="zh-CN" altLang="en-US" sz="2400" b="1" i="0" u="none" strike="noStrike">
+                <a:solidFill>
+                  <a:srgbClr val="FFFFFF"/>
+                </a:solidFill>
+                <a:latin typeface="Noto Sans SC"/>
+                <a:ea typeface="SimSun" charset="0"/>
+                <a:cs typeface="Noto Sans SC"/>
+                <a:sym typeface="Noto Sans SC"/>
+              </a:rPr>
+              <a:t>模型</a:t>
+            </a:r>
+            <a:endParaRPr lang="zh-CN" altLang="en-US" sz="2400" b="1" i="0" u="none" strike="noStrike">
+              <a:solidFill>
+                <a:srgbClr val="FFFFFF"/>
+              </a:solidFill>
+              <a:latin typeface="Noto Sans SC"/>
+              <a:ea typeface="SimSun" charset="0"/>
+              <a:cs typeface="Noto Sans SC"/>
+              <a:sym typeface="Noto Sans SC"/>
+            </a:endParaRPr>
+          </a:p>
+          <a:p>
+            <a:pPr marL="0" indent="0" algn="ctr">
+              <a:lnSpc>
+                <a:spcPct val="125000"/>
+              </a:lnSpc>
+              <a:defRPr/>
+            </a:pPr>
+            <a:r>
+              <a:rPr lang="zh-CN" altLang="en-US" sz="2400" b="1" i="0" u="none" strike="noStrike">
+                <a:solidFill>
+                  <a:srgbClr val="FFFFFF"/>
+                </a:solidFill>
+                <a:latin typeface="Noto Sans SC"/>
+                <a:ea typeface="SimSun" charset="0"/>
+                <a:cs typeface="Noto Sans SC"/>
+                <a:sym typeface="Noto Sans SC"/>
+              </a:rPr>
+              <a:t>原理</a:t>
+            </a:r>
+            <a:endParaRPr lang="zh-CN" altLang="en-US" sz="2400" b="1" i="0" u="none" strike="noStrike">
+              <a:solidFill>
+                <a:srgbClr val="FFFFFF"/>
+              </a:solidFill>
+              <a:latin typeface="Noto Sans SC"/>
+              <a:ea typeface="SimSun" charset="0"/>
+              <a:cs typeface="Noto Sans SC"/>
+              <a:sym typeface="Noto Sans SC"/>
+            </a:endParaRPr>
+          </a:p>
+        </p:txBody>
+      </p:sp>
+      <p:sp>
+        <p:nvSpPr>
+          <p:cNvPr id="9" name="AutoShape 6"/>
+          <p:cNvSpPr/>
+          <p:nvPr/>
+        </p:nvSpPr>
+        <p:spPr>
+          <a:xfrm>
+            <a:off x="3395980" y="4530725"/>
+            <a:ext cx="899795" cy="1545590"/>
+          </a:xfrm>
+          <a:prstGeom prst="roundRect">
+            <a:avLst>
+              <a:gd name="adj" fmla="val 0"/>
+            </a:avLst>
+          </a:prstGeom>
+          <a:solidFill>
+            <a:srgbClr val="B388FF">
+              <a:alpha val="8000"/>
+            </a:srgbClr>
+          </a:solidFill>
+          <a:ln w="25400" cap="flat" cmpd="sng">
+            <a:solidFill>
+              <a:srgbClr val="B388FF">
+                <a:alpha val="100000"/>
+              </a:srgbClr>
+            </a:solidFill>
+            <a:prstDash val="solid"/>
+            <a:round/>
+          </a:ln>
+          <a:effectLst>
+            <a:outerShdw blurRad="152400" dir="2700000" algn="tl" rotWithShape="0">
+              <a:srgbClr val="06F0D2">
+                <a:alpha val="40000"/>
+              </a:srgbClr>
+            </a:outerShdw>
+          </a:effectLst>
+        </p:spPr>
+        <p:txBody>
+          <a:bodyPr vert="horz" wrap="square" lIns="0" tIns="0" rIns="0" bIns="0" rtlCol="0" anchor="ctr" anchorCtr="0">
+            <a:noAutofit/>
+          </a:bodyPr>
+          <a:lstStyle/>
+          <a:p>
+            <a:pPr lvl="0" algn="ctr">
+              <a:lnSpc>
+                <a:spcPct val="100000"/>
+              </a:lnSpc>
+              <a:buClrTx/>
+              <a:buSzTx/>
+              <a:buFontTx/>
+              <a:defRPr/>
+            </a:pPr>
+            <a:r>
+              <a:rPr lang="zh-CN" altLang="en-US" sz="2400" b="1">
+                <a:solidFill>
+                  <a:srgbClr val="FFFFFF"/>
+                </a:solidFill>
+                <a:latin typeface="Noto Sans SC"/>
+                <a:ea typeface="SimSun" charset="0"/>
+                <a:cs typeface="Noto Sans SC"/>
+                <a:sym typeface="Noto Sans SC"/>
+              </a:rPr>
+              <a:t>应用</a:t>
+            </a:r>
+            <a:endParaRPr lang="zh-CN" altLang="en-US" sz="2400" b="1">
+              <a:solidFill>
+                <a:srgbClr val="FFFFFF"/>
+              </a:solidFill>
+              <a:latin typeface="Noto Sans SC"/>
+              <a:ea typeface="SimSun" charset="0"/>
+              <a:cs typeface="Noto Sans SC"/>
+              <a:sym typeface="Noto Sans SC"/>
+            </a:endParaRPr>
+          </a:p>
+          <a:p>
+            <a:pPr lvl="0" algn="ctr">
+              <a:lnSpc>
+                <a:spcPct val="100000"/>
+              </a:lnSpc>
+              <a:buClrTx/>
+              <a:buSzTx/>
+              <a:buFontTx/>
+              <a:defRPr/>
+            </a:pPr>
+            <a:r>
+              <a:rPr lang="zh-CN" altLang="en-US" sz="2400" b="1">
+                <a:solidFill>
+                  <a:srgbClr val="FFFFFF"/>
+                </a:solidFill>
+                <a:latin typeface="Noto Sans SC"/>
+                <a:ea typeface="SimSun" charset="0"/>
+                <a:cs typeface="Noto Sans SC"/>
+                <a:sym typeface="Noto Sans SC"/>
+              </a:rPr>
+              <a:t>与智</a:t>
+            </a:r>
+            <a:endParaRPr lang="zh-CN" altLang="en-US" sz="2400" b="1">
+              <a:solidFill>
+                <a:srgbClr val="FFFFFF"/>
+              </a:solidFill>
+              <a:latin typeface="Noto Sans SC"/>
+              <a:ea typeface="SimSun" charset="0"/>
+              <a:cs typeface="Noto Sans SC"/>
+              <a:sym typeface="Noto Sans SC"/>
+            </a:endParaRPr>
+          </a:p>
+          <a:p>
+            <a:pPr lvl="0" algn="ctr">
+              <a:lnSpc>
+                <a:spcPct val="100000"/>
+              </a:lnSpc>
+              <a:buClrTx/>
+              <a:buSzTx/>
+              <a:buFontTx/>
+              <a:defRPr/>
+            </a:pPr>
+            <a:r>
+              <a:rPr lang="zh-CN" altLang="en-US" sz="2400" b="1">
+                <a:solidFill>
+                  <a:srgbClr val="FFFFFF"/>
+                </a:solidFill>
+                <a:latin typeface="Noto Sans SC"/>
+                <a:ea typeface="SimSun" charset="0"/>
+                <a:cs typeface="Noto Sans SC"/>
+                <a:sym typeface="Noto Sans SC"/>
+              </a:rPr>
+              <a:t>能体</a:t>
+            </a:r>
+            <a:endParaRPr lang="zh-CN" altLang="en-US" sz="2400" b="1">
+              <a:solidFill>
+                <a:srgbClr val="FFFFFF"/>
+              </a:solidFill>
+              <a:latin typeface="Noto Sans SC"/>
+              <a:ea typeface="SimSun" charset="0"/>
+              <a:cs typeface="Noto Sans SC"/>
+              <a:sym typeface="Noto Sans SC"/>
+            </a:endParaRPr>
+          </a:p>
+        </p:txBody>
+      </p:sp>
     </p:spTree>
   </p:cSld>
   <p:clrMapOvr>
@@ -20045,7 +19979,7 @@
                                 </p:cTn>
                               </p:par>
                               <p:par>
-                                <p:cTn id="8" presetID="10" presetClass="entr" presetSubtype="0" fill="hold" grpId="0" nodeType="withEffect">
+                                <p:cTn id="8" presetID="10" presetClass="entr" presetSubtype="0" fill="hold" nodeType="withEffect">
                                   <p:stCondLst>
                                     <p:cond delay="0"/>
                                   </p:stCondLst>
@@ -20058,7 +19992,7 @@
                                           </p:stCondLst>
                                         </p:cTn>
                                         <p:tgtEl>
-                                          <p:spTgt spid="5"/>
+                                          <p:spTgt spid="17"/>
                                         </p:tgtEl>
                                         <p:attrNameLst>
                                           <p:attrName>style.visibility</p:attrName>
@@ -20072,7 +20006,7 @@
                                       <p:cBhvr>
                                         <p:cTn id="10" dur="500"/>
                                         <p:tgtEl>
-                                          <p:spTgt spid="5"/>
+                                          <p:spTgt spid="17"/>
                                         </p:tgtEl>
                                       </p:cBhvr>
                                     </p:animEffect>
@@ -20080,7 +20014,7 @@
                                 </p:cTn>
                               </p:par>
                               <p:par>
-                                <p:cTn id="11" presetID="10" presetClass="entr" presetSubtype="0" fill="hold" grpId="0" nodeType="withEffect">
+                                <p:cTn id="11" presetID="10" presetClass="entr" presetSubtype="0" fill="hold" nodeType="withEffect">
                                   <p:stCondLst>
                                     <p:cond delay="0"/>
                                   </p:stCondLst>
@@ -20093,7 +20027,7 @@
                                           </p:stCondLst>
                                         </p:cTn>
                                         <p:tgtEl>
-                                          <p:spTgt spid="7"/>
+                                          <p:spTgt spid="28"/>
                                         </p:tgtEl>
                                         <p:attrNameLst>
                                           <p:attrName>style.visibility</p:attrName>
@@ -20107,7 +20041,7 @@
                                       <p:cBhvr>
                                         <p:cTn id="13" dur="500"/>
                                         <p:tgtEl>
-                                          <p:spTgt spid="7"/>
+                                          <p:spTgt spid="28"/>
                                         </p:tgtEl>
                                       </p:cBhvr>
                                     </p:animEffect>
@@ -20115,7 +20049,7 @@
                                 </p:cTn>
                               </p:par>
                               <p:par>
-                                <p:cTn id="14" presetID="10" presetClass="entr" presetSubtype="0" fill="hold" grpId="0" nodeType="withEffect">
+                                <p:cTn id="14" presetID="10" presetClass="entr" presetSubtype="0" fill="hold" nodeType="withEffect">
                                   <p:stCondLst>
                                     <p:cond delay="0"/>
                                   </p:stCondLst>
@@ -20128,7 +20062,7 @@
                                           </p:stCondLst>
                                         </p:cTn>
                                         <p:tgtEl>
-                                          <p:spTgt spid="8"/>
+                                          <p:spTgt spid="33"/>
                                         </p:tgtEl>
                                         <p:attrNameLst>
                                           <p:attrName>style.visibility</p:attrName>
@@ -20142,7 +20076,7 @@
                                       <p:cBhvr>
                                         <p:cTn id="16" dur="500"/>
                                         <p:tgtEl>
-                                          <p:spTgt spid="8"/>
+                                          <p:spTgt spid="33"/>
                                         </p:tgtEl>
                                       </p:cBhvr>
                                     </p:animEffect>
@@ -20163,7 +20097,7 @@
                                           </p:stCondLst>
                                         </p:cTn>
                                         <p:tgtEl>
-                                          <p:spTgt spid="17"/>
+                                          <p:spTgt spid="38"/>
                                         </p:tgtEl>
                                         <p:attrNameLst>
                                           <p:attrName>style.visibility</p:attrName>
@@ -20177,7 +20111,7 @@
                                       <p:cBhvr>
                                         <p:cTn id="19" dur="500"/>
                                         <p:tgtEl>
-                                          <p:spTgt spid="17"/>
+                                          <p:spTgt spid="38"/>
                                         </p:tgtEl>
                                       </p:cBhvr>
                                     </p:animEffect>
@@ -20198,7 +20132,7 @@
                                           </p:stCondLst>
                                         </p:cTn>
                                         <p:tgtEl>
-                                          <p:spTgt spid="28"/>
+                                          <p:spTgt spid="18"/>
                                         </p:tgtEl>
                                         <p:attrNameLst>
                                           <p:attrName>style.visibility</p:attrName>
@@ -20212,7 +20146,7 @@
                                       <p:cBhvr>
                                         <p:cTn id="22" dur="500"/>
                                         <p:tgtEl>
-                                          <p:spTgt spid="28"/>
+                                          <p:spTgt spid="18"/>
                                         </p:tgtEl>
                                       </p:cBhvr>
                                     </p:animEffect>
@@ -20233,7 +20167,7 @@
                                           </p:stCondLst>
                                         </p:cTn>
                                         <p:tgtEl>
-                                          <p:spTgt spid="33"/>
+                                          <p:spTgt spid="43"/>
                                         </p:tgtEl>
                                         <p:attrNameLst>
                                           <p:attrName>style.visibility</p:attrName>
@@ -20247,7 +20181,7 @@
                                       <p:cBhvr>
                                         <p:cTn id="25" dur="500"/>
                                         <p:tgtEl>
-                                          <p:spTgt spid="33"/>
+                                          <p:spTgt spid="43"/>
                                         </p:tgtEl>
                                       </p:cBhvr>
                                     </p:animEffect>
@@ -20268,7 +20202,7 @@
                                           </p:stCondLst>
                                         </p:cTn>
                                         <p:tgtEl>
-                                          <p:spTgt spid="38"/>
+                                          <p:spTgt spid="23"/>
                                         </p:tgtEl>
                                         <p:attrNameLst>
                                           <p:attrName>style.visibility</p:attrName>
@@ -20282,7 +20216,7 @@
                                       <p:cBhvr>
                                         <p:cTn id="28" dur="500"/>
                                         <p:tgtEl>
-                                          <p:spTgt spid="38"/>
+                                          <p:spTgt spid="23"/>
                                         </p:tgtEl>
                                       </p:cBhvr>
                                     </p:animEffect>
@@ -20303,7 +20237,7 @@
                                           </p:stCondLst>
                                         </p:cTn>
                                         <p:tgtEl>
-                                          <p:spTgt spid="18"/>
+                                          <p:spTgt spid="48"/>
                                         </p:tgtEl>
                                         <p:attrNameLst>
                                           <p:attrName>style.visibility</p:attrName>
@@ -20317,7 +20251,7 @@
                                       <p:cBhvr>
                                         <p:cTn id="31" dur="500"/>
                                         <p:tgtEl>
-                                          <p:spTgt spid="18"/>
+                                          <p:spTgt spid="48"/>
                                         </p:tgtEl>
                                       </p:cBhvr>
                                     </p:animEffect>
@@ -20325,7 +20259,7 @@
                                 </p:cTn>
                               </p:par>
                               <p:par>
-                                <p:cTn id="32" presetID="10" presetClass="entr" presetSubtype="0" fill="hold" nodeType="withEffect">
+                                <p:cTn id="32" presetID="10" presetClass="entr" presetSubtype="0" fill="hold" grpId="0" nodeType="withEffect">
                                   <p:stCondLst>
                                     <p:cond delay="0"/>
                                   </p:stCondLst>
@@ -20338,7 +20272,7 @@
                                           </p:stCondLst>
                                         </p:cTn>
                                         <p:tgtEl>
-                                          <p:spTgt spid="43"/>
+                                          <p:spTgt spid="3"/>
                                         </p:tgtEl>
                                         <p:attrNameLst>
                                           <p:attrName>style.visibility</p:attrName>
@@ -20352,7 +20286,7 @@
                                       <p:cBhvr>
                                         <p:cTn id="34" dur="500"/>
                                         <p:tgtEl>
-                                          <p:spTgt spid="43"/>
+                                          <p:spTgt spid="3"/>
                                         </p:tgtEl>
                                       </p:cBhvr>
                                     </p:animEffect>
@@ -20360,7 +20294,7 @@
                                 </p:cTn>
                               </p:par>
                               <p:par>
-                                <p:cTn id="35" presetID="10" presetClass="entr" presetSubtype="0" fill="hold" nodeType="withEffect">
+                                <p:cTn id="35" presetID="10" presetClass="entr" presetSubtype="0" fill="hold" grpId="0" nodeType="withEffect">
                                   <p:stCondLst>
                                     <p:cond delay="0"/>
                                   </p:stCondLst>
@@ -20373,7 +20307,7 @@
                                           </p:stCondLst>
                                         </p:cTn>
                                         <p:tgtEl>
-                                          <p:spTgt spid="23"/>
+                                          <p:spTgt spid="9"/>
                                         </p:tgtEl>
                                         <p:attrNameLst>
                                           <p:attrName>style.visibility</p:attrName>
@@ -20387,42 +20321,7 @@
                                       <p:cBhvr>
                                         <p:cTn id="37" dur="500"/>
                                         <p:tgtEl>
-                                          <p:spTgt spid="23"/>
-                                        </p:tgtEl>
-                                      </p:cBhvr>
-                                    </p:animEffect>
-                                  </p:childTnLst>
-                                </p:cTn>
-                              </p:par>
-                              <p:par>
-                                <p:cTn id="38" presetID="10" presetClass="entr" presetSubtype="0" fill="hold" nodeType="withEffect">
-                                  <p:stCondLst>
-                                    <p:cond delay="0"/>
-                                  </p:stCondLst>
-                                  <p:childTnLst>
-                                    <p:set>
-                                      <p:cBhvr>
-                                        <p:cTn id="39" dur="1" fill="hold">
-                                          <p:stCondLst>
-                                            <p:cond delay="0"/>
-                                          </p:stCondLst>
-                                        </p:cTn>
-                                        <p:tgtEl>
-                                          <p:spTgt spid="48"/>
-                                        </p:tgtEl>
-                                        <p:attrNameLst>
-                                          <p:attrName>style.visibility</p:attrName>
-                                        </p:attrNameLst>
-                                      </p:cBhvr>
-                                      <p:to>
-                                        <p:strVal val="visible"/>
-                                      </p:to>
-                                    </p:set>
-                                    <p:animEffect transition="in" filter="fade">
-                                      <p:cBhvr>
-                                        <p:cTn id="40" dur="500"/>
-                                        <p:tgtEl>
-                                          <p:spTgt spid="48"/>
+                                          <p:spTgt spid="9"/>
                                         </p:tgtEl>
                                       </p:cBhvr>
                                     </p:animEffect>
@@ -20459,12 +20358,10 @@
     <p:bldLst>
       <p:bldP spid="6" grpId="0" bldLvl="0" animBg="1"/>
       <p:bldP spid="6" grpId="1" animBg="1"/>
-      <p:bldP spid="5" grpId="0" bldLvl="0" animBg="1"/>
-      <p:bldP spid="5" grpId="1" animBg="1"/>
-      <p:bldP spid="7" grpId="0" bldLvl="0" animBg="1"/>
-      <p:bldP spid="7" grpId="1" animBg="1"/>
-      <p:bldP spid="8" grpId="0" bldLvl="0" animBg="1"/>
-      <p:bldP spid="8" grpId="1" animBg="1"/>
+      <p:bldP spid="3" grpId="0" bldLvl="0" animBg="1"/>
+      <p:bldP spid="3" grpId="1" animBg="1"/>
+      <p:bldP spid="9" grpId="0" bldLvl="0" animBg="1"/>
+      <p:bldP spid="9" grpId="1" animBg="1"/>
     </p:bldLst>
   </p:timing>
 </p:sld>
